--- a/public/materialy/1L/10/Prezentace k hodinám/3. Proč AI chybuje a jak ověřovat.pptx
+++ b/public/materialy/1L/10/Prezentace k hodinám/3. Proč AI chybuje a jak ověřovat.pptx
@@ -548,7 +548,7 @@
           </a:p>
           <a:p xmlns:a="http://schemas.openxmlformats.org/drawingml/2006/main">
             <a:r>
-              <a:t>Podklady: 01_laborator_fungovani_AI.html, 03_odpovedi_k_overeni.txt</a:t>
+              <a:t>Podklady: 1. Laboratoř fungování AI.html, 3. Odpovědi k ověření.txt</a:t>
             </a:r>
           </a:p>
           <a:p xmlns:a="http://schemas.openxmlformats.org/drawingml/2006/main">
@@ -578,7 +578,7 @@
           </a:p>
           <a:p xmlns:a="http://schemas.openxmlformats.org/drawingml/2006/main">
             <a:r>
-              <a:t>AI_Fluency__Key_Terminology_Cheat_Sheet.pdf</a:t>
+              <a:t>AI_Fluency_Key_Terminology_Cheat_Sheet.pdf</a:t>
             </a:r>
           </a:p>
           <a:p xmlns:a="http://schemas.openxmlformats.org/drawingml/2006/main">
@@ -698,7 +698,7 @@
           </a:p>
           <a:p xmlns:a="http://schemas.openxmlformats.org/drawingml/2006/main">
             <a:r>
-              <a:t>AI_Fluency__Key_Terminology_Cheat_Sheet.pdf</a:t>
+              <a:t>AI_Fluency_Key_Terminology_Cheat_Sheet.pdf</a:t>
             </a:r>
           </a:p>
           <a:p xmlns:a="http://schemas.openxmlformats.org/drawingml/2006/main">
@@ -818,7 +818,7 @@
           </a:p>
           <a:p xmlns:a="http://schemas.openxmlformats.org/drawingml/2006/main">
             <a:r>
-              <a:t>AI_Fluency__Key_Terminology_Cheat_Sheet.pdf</a:t>
+              <a:t>AI_Fluency_Key_Terminology_Cheat_Sheet.pdf</a:t>
             </a:r>
           </a:p>
           <a:p xmlns:a="http://schemas.openxmlformats.org/drawingml/2006/main">
@@ -903,12 +903,12 @@
           <a:lstStyle xmlns:a="http://schemas.openxmlformats.org/drawingml/2006/main"/>
           <a:p xmlns:a="http://schemas.openxmlformats.org/drawingml/2006/main">
             <a:r>
-              <a:t>Podklady: 01_laborator_fungovani_AI.html, 03_odpovedi_k_overeni.txt</a:t>
-            </a:r>
-          </a:p>
-          <a:p xmlns:a="http://schemas.openxmlformats.org/drawingml/2006/main">
-            <a:r>
-              <a:t>1. V souboru 03_odpovedi_k_overeni.txt zvýrazni přesná ověřitelná tvrzení.</a:t>
+              <a:t>Podklady: 1. Laboratoř fungování AI.html, 3. Odpovědi k ověření.txt</a:t>
+            </a:r>
+          </a:p>
+          <a:p xmlns:a="http://schemas.openxmlformats.org/drawingml/2006/main">
+            <a:r>
+              <a:t>1. V souboru 3. Odpovědi k ověření.txt zvýrazni přesná ověřitelná tvrzení.</a:t>
             </a:r>
           </a:p>
           <a:p xmlns:a="http://schemas.openxmlformats.org/drawingml/2006/main">
@@ -953,7 +953,7 @@
           </a:p>
           <a:p xmlns:a="http://schemas.openxmlformats.org/drawingml/2006/main">
             <a:r>
-              <a:t>AI_Fluency__Key_Terminology_Cheat_Sheet.pdf</a:t>
+              <a:t>AI_Fluency_Key_Terminology_Cheat_Sheet.pdf</a:t>
             </a:r>
           </a:p>
           <a:p xmlns:a="http://schemas.openxmlformats.org/drawingml/2006/main">
@@ -1078,7 +1078,7 @@
           </a:p>
           <a:p xmlns:a="http://schemas.openxmlformats.org/drawingml/2006/main">
             <a:r>
-              <a:t>AI_Fluency__Key_Terminology_Cheat_Sheet.pdf</a:t>
+              <a:t>AI_Fluency_Key_Terminology_Cheat_Sheet.pdf</a:t>
             </a:r>
           </a:p>
           <a:p xmlns:a="http://schemas.openxmlformats.org/drawingml/2006/main">
@@ -1193,7 +1193,7 @@
           </a:p>
           <a:p xmlns:a="http://schemas.openxmlformats.org/drawingml/2006/main">
             <a:r>
-              <a:t>AI_Fluency__Key_Terminology_Cheat_Sheet.pdf</a:t>
+              <a:t>AI_Fluency_Key_Terminology_Cheat_Sheet.pdf</a:t>
             </a:r>
           </a:p>
           <a:p xmlns:a="http://schemas.openxmlformats.org/drawingml/2006/main">
@@ -1308,7 +1308,7 @@
           </a:p>
           <a:p xmlns:a="http://schemas.openxmlformats.org/drawingml/2006/main">
             <a:r>
-              <a:t>AI_Fluency__Key_Terminology_Cheat_Sheet.pdf</a:t>
+              <a:t>AI_Fluency_Key_Terminology_Cheat_Sheet.pdf</a:t>
             </a:r>
           </a:p>
           <a:p xmlns:a="http://schemas.openxmlformats.org/drawingml/2006/main">
@@ -4040,7 +4040,7 @@
               </a:defRPr>
             </a:pPr>
             <a:r>
-              <a:t>01_laborator_fungovani_AI.html · 03_odpovedi_k_overeni.txt</a:t>
+              <a:t>1. Laboratoř fungování AI.html · 3. Odpovědi k ověření.txt</a:t>
             </a:r>
           </a:p>
         </p:txBody>
@@ -4163,7 +4163,7 @@
               </a:defRPr>
             </a:pPr>
             <a:r>
-              <a:t>V souboru 03_odpovedi_k_overeni.txt zvýrazni přesná ověřitelná tvrzení.</a:t>
+              <a:t>V souboru 3. Odpovědi k ověření.txt zvýrazni přesná ověřitelná tvrzení.</a:t>
             </a:r>
           </a:p>
         </p:txBody>

--- a/public/materialy/1L/10/Prezentace k hodinám/3. Proč AI chybuje a jak ověřovat.pptx
+++ b/public/materialy/1L/10/Prezentace k hodinám/3. Proč AI chybuje a jak ověřovat.pptx
@@ -558,7 +558,7 @@
           </a:p>
           <a:p xmlns:a="http://schemas.openxmlformats.org/drawingml/2006/main">
             <a:r>
-              <a:t>Před začátkem ověřte, že studenti mají otevřený digitální pracovní sešit a potřebné soubory.</a:t>
+              <a:t>Před začátkem ověř, že studenti mají otevřený digitální pracovní sešit a potřebné soubory.</a:t>
             </a:r>
           </a:p>
           <a:p xmlns:a="http://schemas.openxmlformats.org/drawingml/2006/main">
@@ -668,7 +668,7 @@
           </a:p>
           <a:p xmlns:a="http://schemas.openxmlformats.org/drawingml/2006/main">
             <a:r>
-              <a:t>Postup: Porovnejte dvě stejně sebejisté odpovědi, z nichž pouze jedna má věcnou oporu.</a:t>
+              <a:t>Postup: Porovnej dvě stejně sebejisté odpovědi, z nichž pouze jedna má věcnou oporu.</a:t>
             </a:r>
           </a:p>
           <a:p xmlns:a="http://schemas.openxmlformats.org/drawingml/2006/main">
@@ -678,7 +678,7 @@
           </a:p>
           <a:p xmlns:a="http://schemas.openxmlformats.org/drawingml/2006/main">
             <a:r>
-              <a:t>Neprozrazujte odpověď. Cílem je zachytit počáteční model studenta, ke kterému se vrátí při reflexi.</a:t>
+              <a:t>Neprozrazuj odpověď. Cílem je zachytit počáteční model studenta, ke kterému se vrátí při reflexi.</a:t>
             </a:r>
           </a:p>
           <a:p xmlns:a="http://schemas.openxmlformats.org/drawingml/2006/main">
@@ -788,7 +788,7 @@
           </a:p>
           <a:p xmlns:a="http://schemas.openxmlformats.org/drawingml/2006/main">
             <a:r>
-              <a:t>Postup: Vymezte halucinaci, bias, chybějící kontext a zastaralost.</a:t>
+              <a:t>Postup: Vymez halucinaci, bias, chybějící kontext a zastaralost.</a:t>
             </a:r>
           </a:p>
           <a:p xmlns:a="http://schemas.openxmlformats.org/drawingml/2006/main">
@@ -798,7 +798,7 @@
           </a:p>
           <a:p xmlns:a="http://schemas.openxmlformats.org/drawingml/2006/main">
             <a:r>
-              <a:t>Po každém pojmu vyžádejte jeden příklad a jeden protipříklad. Vysvětlení má používat způsob fungování, ne značku nástroje.</a:t>
+              <a:t>Po každém pojmu vyžádej jeden příklad a jeden protipříklad. Vysvětlení má používat způsob fungování, ne značku nástroje.</a:t>
             </a:r>
           </a:p>
           <a:p xmlns:a="http://schemas.openxmlformats.org/drawingml/2006/main">
@@ -933,7 +933,7 @@
           </a:p>
           <a:p xmlns:a="http://schemas.openxmlformats.org/drawingml/2006/main">
             <a:r>
-              <a:t>Během práce pomáhejte otázkami, nepřebírejte myš ani tvorbu promptu. Vyžadujte průběžné ukládání výstupů a lidských rozhodnutí.</a:t>
+              <a:t>Během práce pomáhej otázkami, nepřebírej myš ani tvorbu promptu. Vyžaduj průběžné ukládání výstupů a lidských rozhodnutí.</a:t>
             </a:r>
           </a:p>
           <a:p xmlns:a="http://schemas.openxmlformats.org/drawingml/2006/main">
@@ -1048,7 +1048,7 @@
           </a:p>
           <a:p xmlns:a="http://schemas.openxmlformats.org/drawingml/2006/main">
             <a:r>
-              <a:t>Podpora: Nabídněte mapu typ tvrzení → vhodný zdroj → kontrolní otázka.</a:t>
+              <a:t>Podpora: Nabídni mapu typ tvrzení → vhodný zdroj → kontrolní otázka.</a:t>
             </a:r>
           </a:p>
           <a:p xmlns:a="http://schemas.openxmlformats.org/drawingml/2006/main">
@@ -1058,7 +1058,7 @@
           </a:p>
           <a:p xmlns:a="http://schemas.openxmlformats.org/drawingml/2006/main">
             <a:r>
-              <a:t>Proveďte rychlou párovou kontrolu: jeden dobře doložený bod a jedna konkrétní otázka k dopracování.</a:t>
+              <a:t>Proveď rychlou párovou kontrolu: jeden dobře doložený bod a jedna konkrétní otázka k dopracování.</a:t>
             </a:r>
           </a:p>
           <a:p xmlns:a="http://schemas.openxmlformats.org/drawingml/2006/main">
@@ -1168,12 +1168,12 @@
           </a:p>
           <a:p xmlns:a="http://schemas.openxmlformats.org/drawingml/2006/main">
             <a:r>
-              <a:t>Časté omyly: „Když AI uvede zdroj, zdroj existuje.“ → Kontrolujte autora, název, odkaz i to, zda zdroj tvrzení skutečně podporuje. | „Stačí zeptat se AI, jestli si je jistá.“ → Sebehodnocení modelu nenahrazuje externí důkaz.</a:t>
-            </a:r>
-          </a:p>
-          <a:p xmlns:a="http://schemas.openxmlformats.org/drawingml/2006/main">
-            <a:r>
-              <a:t>Nečtěte řešení slovo od slova. Porovnejte dva studentské postupy a nechte třídu určit, který má lepší důkazy nebo jasnější lidské rozhodnutí.</a:t>
+              <a:t>Časté omyly: „Když AI uvede zdroj, zdroj existuje.“ → Kontroluj autora, název, odkaz i to, zda zdroj tvrzení skutečně podporuje. | „Stačí zeptat se AI, jestli si je jistá.“ → Sebehodnocení modelu nenahrazuje externí důkaz.</a:t>
+            </a:r>
+          </a:p>
+          <a:p xmlns:a="http://schemas.openxmlformats.org/drawingml/2006/main">
+            <a:r>
+              <a:t>Nečti řešení slovo od slova. Porovnej dva studentské postupy a nech třídu určit, který má lepší důkazy nebo jasnější lidské rozhodnutí.</a:t>
             </a:r>
           </a:p>
           <a:p xmlns:a="http://schemas.openxmlformats.org/drawingml/2006/main">
@@ -1288,7 +1288,7 @@
           </a:p>
           <a:p xmlns:a="http://schemas.openxmlformats.org/drawingml/2006/main">
             <a:r>
-              <a:t>Odpovědi použijte jako diagnostiku pro začátek další hodiny. U hodiny 3 navazuje diagnostická brána; u hodiny 6 jde o součást závěrečné reflexe.</a:t>
+              <a:t>Odpovědi použij jako diagnostiku pro začátek další hodiny. U hodiny 3 navazuje diagnostická brána; u hodiny 6 jde o součást závěrečné reflexe.</a:t>
             </a:r>
           </a:p>
           <a:p xmlns:a="http://schemas.openxmlformats.org/drawingml/2006/main">
